--- a/docs/pptx/entire/ritu-entire-linsubhr-ratio-hosp3_10pct.pptx
+++ b/docs/pptx/entire/ritu-entire-linsubhr-ratio-hosp3_10pct.pptx
@@ -3432,510 +3432,510 @@
           </p:nvSpPr>
           <p:spPr>
             <a:xfrm>
-              <a:off x="1263567" y="2073503"/>
-              <a:ext cx="6999111" cy="3477921"/>
+              <a:off x="1268869" y="2073503"/>
+              <a:ext cx="6993810" cy="3477978"/>
             </a:xfrm>
             <a:custGeom>
               <a:avLst/>
               <a:pathLst>
-                <a:path w="6999111" h="3477921">
+                <a:path w="6993810" h="3477978">
                   <a:moveTo>
-                    <a:pt x="2261571" y="0"/>
+                    <a:pt x="2258302" y="0"/>
                   </a:moveTo>
                   <a:lnTo>
-                    <a:pt x="2272025" y="50846"/>
-                  </a:lnTo>
-                  <a:lnTo>
-                    <a:pt x="2343647" y="367111"/>
-                  </a:lnTo>
-                  <a:lnTo>
-                    <a:pt x="2415270" y="654239"/>
-                  </a:lnTo>
-                  <a:lnTo>
-                    <a:pt x="2486892" y="914915"/>
-                  </a:lnTo>
-                  <a:lnTo>
-                    <a:pt x="2558515" y="1151575"/>
-                  </a:lnTo>
-                  <a:lnTo>
-                    <a:pt x="2630137" y="1366432"/>
-                  </a:lnTo>
-                  <a:lnTo>
-                    <a:pt x="2701760" y="1561495"/>
-                  </a:lnTo>
-                  <a:lnTo>
-                    <a:pt x="2773382" y="1738588"/>
-                  </a:lnTo>
-                  <a:lnTo>
-                    <a:pt x="2845005" y="1899365"/>
-                  </a:lnTo>
-                  <a:lnTo>
-                    <a:pt x="2916627" y="2045330"/>
-                  </a:lnTo>
-                  <a:lnTo>
-                    <a:pt x="2988250" y="2177848"/>
-                  </a:lnTo>
-                  <a:lnTo>
-                    <a:pt x="3059872" y="2298157"/>
-                  </a:lnTo>
-                  <a:lnTo>
-                    <a:pt x="3131495" y="2407383"/>
-                  </a:lnTo>
-                  <a:lnTo>
-                    <a:pt x="3203117" y="2506546"/>
-                  </a:lnTo>
-                  <a:lnTo>
-                    <a:pt x="3274740" y="2596573"/>
-                  </a:lnTo>
-                  <a:lnTo>
-                    <a:pt x="3346362" y="2662044"/>
-                  </a:lnTo>
-                  <a:lnTo>
-                    <a:pt x="3417985" y="2687057"/>
-                  </a:lnTo>
-                  <a:lnTo>
-                    <a:pt x="3489608" y="2711310"/>
-                  </a:lnTo>
-                  <a:lnTo>
-                    <a:pt x="3561230" y="2734824"/>
-                  </a:lnTo>
-                  <a:lnTo>
-                    <a:pt x="3632853" y="2757622"/>
-                  </a:lnTo>
-                  <a:lnTo>
-                    <a:pt x="3704475" y="2779726"/>
-                  </a:lnTo>
-                  <a:lnTo>
-                    <a:pt x="3776098" y="2801158"/>
-                  </a:lnTo>
-                  <a:lnTo>
-                    <a:pt x="3847720" y="2821937"/>
-                  </a:lnTo>
-                  <a:lnTo>
-                    <a:pt x="3919343" y="2842083"/>
-                  </a:lnTo>
-                  <a:lnTo>
-                    <a:pt x="3990965" y="2861616"/>
-                  </a:lnTo>
-                  <a:lnTo>
-                    <a:pt x="4062588" y="2880555"/>
-                  </a:lnTo>
-                  <a:lnTo>
-                    <a:pt x="4134210" y="2898917"/>
-                  </a:lnTo>
-                  <a:lnTo>
-                    <a:pt x="4205833" y="2916720"/>
-                  </a:lnTo>
-                  <a:lnTo>
-                    <a:pt x="4277455" y="2933981"/>
-                  </a:lnTo>
-                  <a:lnTo>
-                    <a:pt x="4349078" y="2950717"/>
-                  </a:lnTo>
-                  <a:lnTo>
-                    <a:pt x="4420700" y="2966943"/>
-                  </a:lnTo>
-                  <a:lnTo>
-                    <a:pt x="4492323" y="2982675"/>
-                  </a:lnTo>
-                  <a:lnTo>
-                    <a:pt x="4563945" y="2997929"/>
-                  </a:lnTo>
-                  <a:lnTo>
-                    <a:pt x="4635568" y="3012718"/>
-                  </a:lnTo>
-                  <a:lnTo>
-                    <a:pt x="4707190" y="3027056"/>
-                  </a:lnTo>
-                  <a:lnTo>
-                    <a:pt x="4778813" y="3040959"/>
-                  </a:lnTo>
-                  <a:lnTo>
-                    <a:pt x="4850436" y="3054438"/>
-                  </a:lnTo>
-                  <a:lnTo>
-                    <a:pt x="4922058" y="3067507"/>
-                  </a:lnTo>
-                  <a:lnTo>
-                    <a:pt x="4993681" y="3080177"/>
-                  </a:lnTo>
-                  <a:lnTo>
-                    <a:pt x="5065303" y="3092463"/>
-                  </a:lnTo>
-                  <a:lnTo>
-                    <a:pt x="5136926" y="3104374"/>
-                  </a:lnTo>
-                  <a:lnTo>
-                    <a:pt x="5208548" y="3115923"/>
-                  </a:lnTo>
-                  <a:lnTo>
-                    <a:pt x="5280171" y="3127120"/>
-                  </a:lnTo>
-                  <a:lnTo>
-                    <a:pt x="5351793" y="3137976"/>
-                  </a:lnTo>
-                  <a:lnTo>
-                    <a:pt x="5423416" y="3148502"/>
-                  </a:lnTo>
-                  <a:lnTo>
-                    <a:pt x="5495038" y="3158707"/>
-                  </a:lnTo>
-                  <a:lnTo>
-                    <a:pt x="5566661" y="3168602"/>
-                  </a:lnTo>
-                  <a:lnTo>
-                    <a:pt x="5638283" y="3178195"/>
-                  </a:lnTo>
-                  <a:lnTo>
-                    <a:pt x="5709906" y="3187497"/>
-                  </a:lnTo>
-                  <a:lnTo>
-                    <a:pt x="5781528" y="3196515"/>
-                  </a:lnTo>
-                  <a:lnTo>
-                    <a:pt x="5853151" y="3205259"/>
-                  </a:lnTo>
-                  <a:lnTo>
-                    <a:pt x="5924773" y="3213736"/>
-                  </a:lnTo>
-                  <a:lnTo>
-                    <a:pt x="5996396" y="3221956"/>
-                  </a:lnTo>
-                  <a:lnTo>
-                    <a:pt x="6068018" y="3229925"/>
-                  </a:lnTo>
-                  <a:lnTo>
-                    <a:pt x="6139641" y="3237652"/>
-                  </a:lnTo>
-                  <a:lnTo>
-                    <a:pt x="6211264" y="3245143"/>
-                  </a:lnTo>
-                  <a:lnTo>
-                    <a:pt x="6282886" y="3252407"/>
-                  </a:lnTo>
-                  <a:lnTo>
-                    <a:pt x="6354509" y="3259449"/>
-                  </a:lnTo>
-                  <a:lnTo>
-                    <a:pt x="6426131" y="3266277"/>
-                  </a:lnTo>
-                  <a:lnTo>
-                    <a:pt x="6497754" y="3272897"/>
-                  </a:lnTo>
-                  <a:lnTo>
-                    <a:pt x="6569376" y="3279315"/>
-                  </a:lnTo>
-                  <a:lnTo>
-                    <a:pt x="6640999" y="3285539"/>
-                  </a:lnTo>
-                  <a:lnTo>
-                    <a:pt x="6712621" y="3291572"/>
-                  </a:lnTo>
-                  <a:lnTo>
-                    <a:pt x="6784244" y="3297422"/>
-                  </a:lnTo>
-                  <a:lnTo>
-                    <a:pt x="6855866" y="3303094"/>
-                  </a:lnTo>
-                  <a:lnTo>
-                    <a:pt x="6927489" y="3308594"/>
-                  </a:lnTo>
-                  <a:lnTo>
-                    <a:pt x="6999111" y="3313926"/>
-                  </a:lnTo>
-                  <a:lnTo>
-                    <a:pt x="6999111" y="3477921"/>
-                  </a:lnTo>
-                  <a:lnTo>
-                    <a:pt x="6927489" y="3477330"/>
-                  </a:lnTo>
-                  <a:lnTo>
-                    <a:pt x="6855866" y="3476679"/>
-                  </a:lnTo>
-                  <a:lnTo>
-                    <a:pt x="6784244" y="3475962"/>
-                  </a:lnTo>
-                  <a:lnTo>
-                    <a:pt x="6712621" y="3475172"/>
-                  </a:lnTo>
-                  <a:lnTo>
-                    <a:pt x="6640999" y="3474302"/>
-                  </a:lnTo>
-                  <a:lnTo>
-                    <a:pt x="6569376" y="3473344"/>
-                  </a:lnTo>
-                  <a:lnTo>
-                    <a:pt x="6497754" y="3472288"/>
-                  </a:lnTo>
-                  <a:lnTo>
-                    <a:pt x="6426131" y="3471125"/>
-                  </a:lnTo>
-                  <a:lnTo>
-                    <a:pt x="6354509" y="3469844"/>
-                  </a:lnTo>
-                  <a:lnTo>
-                    <a:pt x="6282886" y="3468434"/>
-                  </a:lnTo>
-                  <a:lnTo>
-                    <a:pt x="6211264" y="3466880"/>
-                  </a:lnTo>
-                  <a:lnTo>
-                    <a:pt x="6139641" y="3465168"/>
-                  </a:lnTo>
-                  <a:lnTo>
-                    <a:pt x="6068018" y="3463283"/>
-                  </a:lnTo>
-                  <a:lnTo>
-                    <a:pt x="5996396" y="3461207"/>
-                  </a:lnTo>
-                  <a:lnTo>
-                    <a:pt x="5924773" y="3458919"/>
-                  </a:lnTo>
-                  <a:lnTo>
-                    <a:pt x="5853151" y="3456400"/>
-                  </a:lnTo>
-                  <a:lnTo>
-                    <a:pt x="5781528" y="3453625"/>
-                  </a:lnTo>
-                  <a:lnTo>
-                    <a:pt x="5709906" y="3450568"/>
-                  </a:lnTo>
-                  <a:lnTo>
-                    <a:pt x="5638283" y="3447201"/>
-                  </a:lnTo>
-                  <a:lnTo>
-                    <a:pt x="5566661" y="3443493"/>
-                  </a:lnTo>
-                  <a:lnTo>
-                    <a:pt x="5495038" y="3439408"/>
-                  </a:lnTo>
-                  <a:lnTo>
-                    <a:pt x="5423416" y="3434909"/>
-                  </a:lnTo>
-                  <a:lnTo>
-                    <a:pt x="5351793" y="3429953"/>
-                  </a:lnTo>
-                  <a:lnTo>
-                    <a:pt x="5280171" y="3424494"/>
-                  </a:lnTo>
-                  <a:lnTo>
-                    <a:pt x="5208548" y="3418482"/>
-                  </a:lnTo>
-                  <a:lnTo>
-                    <a:pt x="5136926" y="3411859"/>
-                  </a:lnTo>
-                  <a:lnTo>
-                    <a:pt x="5065303" y="3404564"/>
-                  </a:lnTo>
-                  <a:lnTo>
-                    <a:pt x="4993681" y="3396529"/>
-                  </a:lnTo>
-                  <a:lnTo>
-                    <a:pt x="4922058" y="3387678"/>
-                  </a:lnTo>
-                  <a:lnTo>
-                    <a:pt x="4850436" y="3377930"/>
-                  </a:lnTo>
-                  <a:lnTo>
-                    <a:pt x="4778813" y="3367192"/>
-                  </a:lnTo>
-                  <a:lnTo>
-                    <a:pt x="4707190" y="3355364"/>
-                  </a:lnTo>
-                  <a:lnTo>
-                    <a:pt x="4635568" y="3342336"/>
-                  </a:lnTo>
-                  <a:lnTo>
-                    <a:pt x="4563945" y="3327987"/>
-                  </a:lnTo>
-                  <a:lnTo>
-                    <a:pt x="4492323" y="3312181"/>
-                  </a:lnTo>
-                  <a:lnTo>
-                    <a:pt x="4420700" y="3294771"/>
-                  </a:lnTo>
-                  <a:lnTo>
-                    <a:pt x="4349078" y="3275594"/>
-                  </a:lnTo>
-                  <a:lnTo>
-                    <a:pt x="4277455" y="3254472"/>
-                  </a:lnTo>
-                  <a:lnTo>
-                    <a:pt x="4205833" y="3231206"/>
-                  </a:lnTo>
-                  <a:lnTo>
-                    <a:pt x="4134210" y="3205579"/>
-                  </a:lnTo>
-                  <a:lnTo>
-                    <a:pt x="4062588" y="3177351"/>
-                  </a:lnTo>
-                  <a:lnTo>
-                    <a:pt x="3990965" y="3146260"/>
-                  </a:lnTo>
-                  <a:lnTo>
-                    <a:pt x="3919343" y="3112013"/>
-                  </a:lnTo>
-                  <a:lnTo>
-                    <a:pt x="3847720" y="3074290"/>
-                  </a:lnTo>
-                  <a:lnTo>
-                    <a:pt x="3776098" y="3032740"/>
-                  </a:lnTo>
-                  <a:lnTo>
-                    <a:pt x="3704475" y="2986974"/>
-                  </a:lnTo>
-                  <a:lnTo>
-                    <a:pt x="3632853" y="2936563"/>
-                  </a:lnTo>
-                  <a:lnTo>
-                    <a:pt x="3561230" y="2881037"/>
-                  </a:lnTo>
-                  <a:lnTo>
-                    <a:pt x="3489608" y="2819876"/>
-                  </a:lnTo>
-                  <a:lnTo>
-                    <a:pt x="3417985" y="2752509"/>
-                  </a:lnTo>
-                  <a:lnTo>
-                    <a:pt x="3346362" y="2678306"/>
-                  </a:lnTo>
-                  <a:lnTo>
-                    <a:pt x="3274740" y="2636244"/>
-                  </a:lnTo>
-                  <a:lnTo>
-                    <a:pt x="3203117" y="2609635"/>
-                  </a:lnTo>
-                  <a:lnTo>
-                    <a:pt x="3131495" y="2582191"/>
-                  </a:lnTo>
-                  <a:lnTo>
-                    <a:pt x="3059872" y="2553884"/>
-                  </a:lnTo>
-                  <a:lnTo>
-                    <a:pt x="2988250" y="2524689"/>
-                  </a:lnTo>
-                  <a:lnTo>
-                    <a:pt x="2916627" y="2494577"/>
-                  </a:lnTo>
-                  <a:lnTo>
-                    <a:pt x="2845005" y="2463520"/>
-                  </a:lnTo>
-                  <a:lnTo>
-                    <a:pt x="2773382" y="2431488"/>
-                  </a:lnTo>
-                  <a:lnTo>
-                    <a:pt x="2701760" y="2398450"/>
-                  </a:lnTo>
-                  <a:lnTo>
-                    <a:pt x="2630137" y="2364375"/>
-                  </a:lnTo>
-                  <a:lnTo>
-                    <a:pt x="2558515" y="2329230"/>
-                  </a:lnTo>
-                  <a:lnTo>
-                    <a:pt x="2486892" y="2292981"/>
-                  </a:lnTo>
-                  <a:lnTo>
-                    <a:pt x="2415270" y="2255594"/>
-                  </a:lnTo>
-                  <a:lnTo>
-                    <a:pt x="2343647" y="2217034"/>
-                  </a:lnTo>
-                  <a:lnTo>
-                    <a:pt x="2272025" y="2177262"/>
-                  </a:lnTo>
-                  <a:lnTo>
-                    <a:pt x="2200402" y="2136242"/>
-                  </a:lnTo>
-                  <a:lnTo>
-                    <a:pt x="2128780" y="2093935"/>
-                  </a:lnTo>
-                  <a:lnTo>
-                    <a:pt x="2057157" y="2050298"/>
-                  </a:lnTo>
-                  <a:lnTo>
-                    <a:pt x="1985534" y="2005292"/>
-                  </a:lnTo>
-                  <a:lnTo>
-                    <a:pt x="1913912" y="1958873"/>
-                  </a:lnTo>
-                  <a:lnTo>
-                    <a:pt x="1842289" y="1910996"/>
-                  </a:lnTo>
-                  <a:lnTo>
-                    <a:pt x="1770667" y="1861616"/>
-                  </a:lnTo>
-                  <a:lnTo>
-                    <a:pt x="1699044" y="1810686"/>
-                  </a:lnTo>
-                  <a:lnTo>
-                    <a:pt x="1627422" y="1758156"/>
-                  </a:lnTo>
-                  <a:lnTo>
-                    <a:pt x="1555799" y="1703977"/>
-                  </a:lnTo>
-                  <a:lnTo>
-                    <a:pt x="1484177" y="1648098"/>
-                  </a:lnTo>
-                  <a:lnTo>
-                    <a:pt x="1412554" y="1590463"/>
-                  </a:lnTo>
-                  <a:lnTo>
-                    <a:pt x="1340932" y="1531019"/>
-                  </a:lnTo>
-                  <a:lnTo>
-                    <a:pt x="1269309" y="1469709"/>
-                  </a:lnTo>
-                  <a:lnTo>
-                    <a:pt x="1197687" y="1406474"/>
-                  </a:lnTo>
-                  <a:lnTo>
-                    <a:pt x="1126064" y="1341253"/>
-                  </a:lnTo>
-                  <a:lnTo>
-                    <a:pt x="1054442" y="1273985"/>
-                  </a:lnTo>
-                  <a:lnTo>
-                    <a:pt x="982819" y="1204605"/>
-                  </a:lnTo>
-                  <a:lnTo>
-                    <a:pt x="911197" y="1133046"/>
-                  </a:lnTo>
-                  <a:lnTo>
-                    <a:pt x="839574" y="1059241"/>
-                  </a:lnTo>
-                  <a:lnTo>
-                    <a:pt x="767952" y="983118"/>
-                  </a:lnTo>
-                  <a:lnTo>
-                    <a:pt x="696329" y="904605"/>
-                  </a:lnTo>
-                  <a:lnTo>
-                    <a:pt x="624706" y="823627"/>
-                  </a:lnTo>
-                  <a:lnTo>
-                    <a:pt x="553084" y="740107"/>
-                  </a:lnTo>
-                  <a:lnTo>
-                    <a:pt x="481461" y="653964"/>
-                  </a:lnTo>
-                  <a:lnTo>
-                    <a:pt x="409839" y="565117"/>
-                  </a:lnTo>
-                  <a:lnTo>
-                    <a:pt x="338216" y="473480"/>
-                  </a:lnTo>
-                  <a:lnTo>
-                    <a:pt x="266594" y="378966"/>
-                  </a:lnTo>
-                  <a:lnTo>
-                    <a:pt x="194971" y="281485"/>
-                  </a:lnTo>
-                  <a:lnTo>
-                    <a:pt x="123349" y="180943"/>
-                  </a:lnTo>
-                  <a:lnTo>
-                    <a:pt x="51726" y="77244"/>
+                    <a:pt x="2266723" y="41159"/>
+                  </a:lnTo>
+                  <a:lnTo>
+                    <a:pt x="2338346" y="358915"/>
+                  </a:lnTo>
+                  <a:lnTo>
+                    <a:pt x="2409968" y="647342"/>
+                  </a:lnTo>
+                  <a:lnTo>
+                    <a:pt x="2481591" y="909147"/>
+                  </a:lnTo>
+                  <a:lnTo>
+                    <a:pt x="2553213" y="1146787"/>
+                  </a:lnTo>
+                  <a:lnTo>
+                    <a:pt x="2624836" y="1362492"/>
+                  </a:lnTo>
+                  <a:lnTo>
+                    <a:pt x="2696458" y="1558287"/>
+                  </a:lnTo>
+                  <a:lnTo>
+                    <a:pt x="2768081" y="1736010"/>
+                  </a:lnTo>
+                  <a:lnTo>
+                    <a:pt x="2839703" y="1897329"/>
+                  </a:lnTo>
+                  <a:lnTo>
+                    <a:pt x="2911326" y="2043758"/>
+                  </a:lnTo>
+                  <a:lnTo>
+                    <a:pt x="2982948" y="2176672"/>
+                  </a:lnTo>
+                  <a:lnTo>
+                    <a:pt x="3054571" y="2297317"/>
+                  </a:lnTo>
+                  <a:lnTo>
+                    <a:pt x="3126193" y="2406826"/>
+                  </a:lnTo>
+                  <a:lnTo>
+                    <a:pt x="3197816" y="2506228"/>
+                  </a:lnTo>
+                  <a:lnTo>
+                    <a:pt x="3269439" y="2596454"/>
+                  </a:lnTo>
+                  <a:lnTo>
+                    <a:pt x="3341061" y="2662056"/>
+                  </a:lnTo>
+                  <a:lnTo>
+                    <a:pt x="3412684" y="2687108"/>
+                  </a:lnTo>
+                  <a:lnTo>
+                    <a:pt x="3484306" y="2711397"/>
+                  </a:lnTo>
+                  <a:lnTo>
+                    <a:pt x="3555929" y="2734945"/>
+                  </a:lnTo>
+                  <a:lnTo>
+                    <a:pt x="3627551" y="2757776"/>
+                  </a:lnTo>
+                  <a:lnTo>
+                    <a:pt x="3699174" y="2779910"/>
+                  </a:lnTo>
+                  <a:lnTo>
+                    <a:pt x="3770796" y="2801369"/>
+                  </a:lnTo>
+                  <a:lnTo>
+                    <a:pt x="3842419" y="2822174"/>
+                  </a:lnTo>
+                  <a:lnTo>
+                    <a:pt x="3914041" y="2842345"/>
+                  </a:lnTo>
+                  <a:lnTo>
+                    <a:pt x="3985664" y="2861900"/>
+                  </a:lnTo>
+                  <a:lnTo>
+                    <a:pt x="4057286" y="2880860"/>
+                  </a:lnTo>
+                  <a:lnTo>
+                    <a:pt x="4128909" y="2899241"/>
+                  </a:lnTo>
+                  <a:lnTo>
+                    <a:pt x="4200531" y="2917062"/>
+                  </a:lnTo>
+                  <a:lnTo>
+                    <a:pt x="4272154" y="2934340"/>
+                  </a:lnTo>
+                  <a:lnTo>
+                    <a:pt x="4343776" y="2951091"/>
+                  </a:lnTo>
+                  <a:lnTo>
+                    <a:pt x="4415399" y="2967331"/>
+                  </a:lnTo>
+                  <a:lnTo>
+                    <a:pt x="4487021" y="2983076"/>
+                  </a:lnTo>
+                  <a:lnTo>
+                    <a:pt x="4558644" y="2998341"/>
+                  </a:lnTo>
+                  <a:lnTo>
+                    <a:pt x="4630267" y="3013141"/>
+                  </a:lnTo>
+                  <a:lnTo>
+                    <a:pt x="4701889" y="3027489"/>
+                  </a:lnTo>
+                  <a:lnTo>
+                    <a:pt x="4773512" y="3041400"/>
+                  </a:lnTo>
+                  <a:lnTo>
+                    <a:pt x="4845134" y="3054886"/>
+                  </a:lnTo>
+                  <a:lnTo>
+                    <a:pt x="4916757" y="3067962"/>
+                  </a:lnTo>
+                  <a:lnTo>
+                    <a:pt x="4988379" y="3080639"/>
+                  </a:lnTo>
+                  <a:lnTo>
+                    <a:pt x="5060002" y="3092929"/>
+                  </a:lnTo>
+                  <a:lnTo>
+                    <a:pt x="5131624" y="3104845"/>
+                  </a:lnTo>
+                  <a:lnTo>
+                    <a:pt x="5203247" y="3116397"/>
+                  </a:lnTo>
+                  <a:lnTo>
+                    <a:pt x="5274869" y="3127597"/>
+                  </a:lnTo>
+                  <a:lnTo>
+                    <a:pt x="5346492" y="3138456"/>
+                  </a:lnTo>
+                  <a:lnTo>
+                    <a:pt x="5418114" y="3148983"/>
+                  </a:lnTo>
+                  <a:lnTo>
+                    <a:pt x="5489737" y="3159190"/>
+                  </a:lnTo>
+                  <a:lnTo>
+                    <a:pt x="5561359" y="3169085"/>
+                  </a:lnTo>
+                  <a:lnTo>
+                    <a:pt x="5632982" y="3178679"/>
+                  </a:lnTo>
+                  <a:lnTo>
+                    <a:pt x="5704604" y="3187980"/>
+                  </a:lnTo>
+                  <a:lnTo>
+                    <a:pt x="5776227" y="3196998"/>
+                  </a:lnTo>
+                  <a:lnTo>
+                    <a:pt x="5847849" y="3205741"/>
+                  </a:lnTo>
+                  <a:lnTo>
+                    <a:pt x="5919472" y="3214217"/>
+                  </a:lnTo>
+                  <a:lnTo>
+                    <a:pt x="5991095" y="3222435"/>
+                  </a:lnTo>
+                  <a:lnTo>
+                    <a:pt x="6062717" y="3230402"/>
+                  </a:lnTo>
+                  <a:lnTo>
+                    <a:pt x="6134340" y="3238126"/>
+                  </a:lnTo>
+                  <a:lnTo>
+                    <a:pt x="6205962" y="3245615"/>
+                  </a:lnTo>
+                  <a:lnTo>
+                    <a:pt x="6277585" y="3252875"/>
+                  </a:lnTo>
+                  <a:lnTo>
+                    <a:pt x="6349207" y="3259914"/>
+                  </a:lnTo>
+                  <a:lnTo>
+                    <a:pt x="6420830" y="3266739"/>
+                  </a:lnTo>
+                  <a:lnTo>
+                    <a:pt x="6492452" y="3273355"/>
+                  </a:lnTo>
+                  <a:lnTo>
+                    <a:pt x="6564075" y="3279770"/>
+                  </a:lnTo>
+                  <a:lnTo>
+                    <a:pt x="6635697" y="3285989"/>
+                  </a:lnTo>
+                  <a:lnTo>
+                    <a:pt x="6707320" y="3292018"/>
+                  </a:lnTo>
+                  <a:lnTo>
+                    <a:pt x="6778942" y="3297864"/>
+                  </a:lnTo>
+                  <a:lnTo>
+                    <a:pt x="6850565" y="3303531"/>
+                  </a:lnTo>
+                  <a:lnTo>
+                    <a:pt x="6922187" y="3309026"/>
+                  </a:lnTo>
+                  <a:lnTo>
+                    <a:pt x="6993810" y="3314353"/>
+                  </a:lnTo>
+                  <a:lnTo>
+                    <a:pt x="6993810" y="3477978"/>
+                  </a:lnTo>
+                  <a:lnTo>
+                    <a:pt x="6922187" y="3477392"/>
+                  </a:lnTo>
+                  <a:lnTo>
+                    <a:pt x="6850565" y="3476746"/>
+                  </a:lnTo>
+                  <a:lnTo>
+                    <a:pt x="6778942" y="3476034"/>
+                  </a:lnTo>
+                  <a:lnTo>
+                    <a:pt x="6707320" y="3475250"/>
+                  </a:lnTo>
+                  <a:lnTo>
+                    <a:pt x="6635697" y="3474385"/>
+                  </a:lnTo>
+                  <a:lnTo>
+                    <a:pt x="6564075" y="3473434"/>
+                  </a:lnTo>
+                  <a:lnTo>
+                    <a:pt x="6492452" y="3472385"/>
+                  </a:lnTo>
+                  <a:lnTo>
+                    <a:pt x="6420830" y="3471230"/>
+                  </a:lnTo>
+                  <a:lnTo>
+                    <a:pt x="6349207" y="3469957"/>
+                  </a:lnTo>
+                  <a:lnTo>
+                    <a:pt x="6277585" y="3468555"/>
+                  </a:lnTo>
+                  <a:lnTo>
+                    <a:pt x="6205962" y="3467010"/>
+                  </a:lnTo>
+                  <a:lnTo>
+                    <a:pt x="6134340" y="3465308"/>
+                  </a:lnTo>
+                  <a:lnTo>
+                    <a:pt x="6062717" y="3463433"/>
+                  </a:lnTo>
+                  <a:lnTo>
+                    <a:pt x="5991095" y="3461367"/>
+                  </a:lnTo>
+                  <a:lnTo>
+                    <a:pt x="5919472" y="3459091"/>
+                  </a:lnTo>
+                  <a:lnTo>
+                    <a:pt x="5847849" y="3456584"/>
+                  </a:lnTo>
+                  <a:lnTo>
+                    <a:pt x="5776227" y="3453822"/>
+                  </a:lnTo>
+                  <a:lnTo>
+                    <a:pt x="5704604" y="3450779"/>
+                  </a:lnTo>
+                  <a:lnTo>
+                    <a:pt x="5632982" y="3447427"/>
+                  </a:lnTo>
+                  <a:lnTo>
+                    <a:pt x="5561359" y="3443734"/>
+                  </a:lnTo>
+                  <a:lnTo>
+                    <a:pt x="5489737" y="3439665"/>
+                  </a:lnTo>
+                  <a:lnTo>
+                    <a:pt x="5418114" y="3435183"/>
+                  </a:lnTo>
+                  <a:lnTo>
+                    <a:pt x="5346492" y="3430244"/>
+                  </a:lnTo>
+                  <a:lnTo>
+                    <a:pt x="5274869" y="3424804"/>
+                  </a:lnTo>
+                  <a:lnTo>
+                    <a:pt x="5203247" y="3418810"/>
+                  </a:lnTo>
+                  <a:lnTo>
+                    <a:pt x="5131624" y="3412207"/>
+                  </a:lnTo>
+                  <a:lnTo>
+                    <a:pt x="5060002" y="3404932"/>
+                  </a:lnTo>
+                  <a:lnTo>
+                    <a:pt x="4988379" y="3396918"/>
+                  </a:lnTo>
+                  <a:lnTo>
+                    <a:pt x="4916757" y="3388088"/>
+                  </a:lnTo>
+                  <a:lnTo>
+                    <a:pt x="4845134" y="3378361"/>
+                  </a:lnTo>
+                  <a:lnTo>
+                    <a:pt x="4773512" y="3367645"/>
+                  </a:lnTo>
+                  <a:lnTo>
+                    <a:pt x="4701889" y="3355838"/>
+                  </a:lnTo>
+                  <a:lnTo>
+                    <a:pt x="4630267" y="3342832"/>
+                  </a:lnTo>
+                  <a:lnTo>
+                    <a:pt x="4558644" y="3328503"/>
+                  </a:lnTo>
+                  <a:lnTo>
+                    <a:pt x="4487021" y="3312716"/>
+                  </a:lnTo>
+                  <a:lnTo>
+                    <a:pt x="4415399" y="3295325"/>
+                  </a:lnTo>
+                  <a:lnTo>
+                    <a:pt x="4343776" y="3276164"/>
+                  </a:lnTo>
+                  <a:lnTo>
+                    <a:pt x="4272154" y="3255056"/>
+                  </a:lnTo>
+                  <a:lnTo>
+                    <a:pt x="4200531" y="3231801"/>
+                  </a:lnTo>
+                  <a:lnTo>
+                    <a:pt x="4128909" y="3206181"/>
+                  </a:lnTo>
+                  <a:lnTo>
+                    <a:pt x="4057286" y="3177956"/>
+                  </a:lnTo>
+                  <a:lnTo>
+                    <a:pt x="3985664" y="3146861"/>
+                  </a:lnTo>
+                  <a:lnTo>
+                    <a:pt x="3914041" y="3112604"/>
+                  </a:lnTo>
+                  <a:lnTo>
+                    <a:pt x="3842419" y="3074864"/>
+                  </a:lnTo>
+                  <a:lnTo>
+                    <a:pt x="3770796" y="3033285"/>
+                  </a:lnTo>
+                  <a:lnTo>
+                    <a:pt x="3699174" y="2987479"/>
+                  </a:lnTo>
+                  <a:lnTo>
+                    <a:pt x="3627551" y="2937015"/>
+                  </a:lnTo>
+                  <a:lnTo>
+                    <a:pt x="3555929" y="2881419"/>
+                  </a:lnTo>
+                  <a:lnTo>
+                    <a:pt x="3484306" y="2820170"/>
+                  </a:lnTo>
+                  <a:lnTo>
+                    <a:pt x="3412684" y="2752692"/>
+                  </a:lnTo>
+                  <a:lnTo>
+                    <a:pt x="3341061" y="2678353"/>
+                  </a:lnTo>
+                  <a:lnTo>
+                    <a:pt x="3269439" y="2636216"/>
+                  </a:lnTo>
+                  <a:lnTo>
+                    <a:pt x="3197816" y="2609563"/>
+                  </a:lnTo>
+                  <a:lnTo>
+                    <a:pt x="3126193" y="2582071"/>
+                  </a:lnTo>
+                  <a:lnTo>
+                    <a:pt x="3054571" y="2553716"/>
+                  </a:lnTo>
+                  <a:lnTo>
+                    <a:pt x="2982948" y="2524468"/>
+                  </a:lnTo>
+                  <a:lnTo>
+                    <a:pt x="2911326" y="2494301"/>
+                  </a:lnTo>
+                  <a:lnTo>
+                    <a:pt x="2839703" y="2463185"/>
+                  </a:lnTo>
+                  <a:lnTo>
+                    <a:pt x="2768081" y="2431090"/>
+                  </a:lnTo>
+                  <a:lnTo>
+                    <a:pt x="2696458" y="2397987"/>
+                  </a:lnTo>
+                  <a:lnTo>
+                    <a:pt x="2624836" y="2363842"/>
+                  </a:lnTo>
+                  <a:lnTo>
+                    <a:pt x="2553213" y="2328623"/>
+                  </a:lnTo>
+                  <a:lnTo>
+                    <a:pt x="2481591" y="2292297"/>
+                  </a:lnTo>
+                  <a:lnTo>
+                    <a:pt x="2409968" y="2254829"/>
+                  </a:lnTo>
+                  <a:lnTo>
+                    <a:pt x="2338346" y="2216182"/>
+                  </a:lnTo>
+                  <a:lnTo>
+                    <a:pt x="2266723" y="2176320"/>
+                  </a:lnTo>
+                  <a:lnTo>
+                    <a:pt x="2195101" y="2135204"/>
+                  </a:lnTo>
+                  <a:lnTo>
+                    <a:pt x="2123478" y="2092795"/>
+                  </a:lnTo>
+                  <a:lnTo>
+                    <a:pt x="2051856" y="2049053"/>
+                  </a:lnTo>
+                  <a:lnTo>
+                    <a:pt x="1980233" y="2003935"/>
+                  </a:lnTo>
+                  <a:lnTo>
+                    <a:pt x="1908611" y="1957398"/>
+                  </a:lnTo>
+                  <a:lnTo>
+                    <a:pt x="1836988" y="1909397"/>
+                  </a:lnTo>
+                  <a:lnTo>
+                    <a:pt x="1765365" y="1859888"/>
+                  </a:lnTo>
+                  <a:lnTo>
+                    <a:pt x="1693743" y="1808821"/>
+                  </a:lnTo>
+                  <a:lnTo>
+                    <a:pt x="1622120" y="1756148"/>
+                  </a:lnTo>
+                  <a:lnTo>
+                    <a:pt x="1550498" y="1701819"/>
+                  </a:lnTo>
+                  <a:lnTo>
+                    <a:pt x="1478875" y="1645781"/>
+                  </a:lnTo>
+                  <a:lnTo>
+                    <a:pt x="1407253" y="1587981"/>
+                  </a:lnTo>
+                  <a:lnTo>
+                    <a:pt x="1335630" y="1528363"/>
+                  </a:lnTo>
+                  <a:lnTo>
+                    <a:pt x="1264008" y="1466871"/>
+                  </a:lnTo>
+                  <a:lnTo>
+                    <a:pt x="1192385" y="1403444"/>
+                  </a:lnTo>
+                  <a:lnTo>
+                    <a:pt x="1120763" y="1338023"/>
+                  </a:lnTo>
+                  <a:lnTo>
+                    <a:pt x="1049140" y="1270545"/>
+                  </a:lnTo>
+                  <a:lnTo>
+                    <a:pt x="977518" y="1200944"/>
+                  </a:lnTo>
+                  <a:lnTo>
+                    <a:pt x="905895" y="1129155"/>
+                  </a:lnTo>
+                  <a:lnTo>
+                    <a:pt x="834273" y="1055108"/>
+                  </a:lnTo>
+                  <a:lnTo>
+                    <a:pt x="762650" y="978733"/>
+                  </a:lnTo>
+                  <a:lnTo>
+                    <a:pt x="691028" y="899956"/>
+                  </a:lnTo>
+                  <a:lnTo>
+                    <a:pt x="619405" y="818701"/>
+                  </a:lnTo>
+                  <a:lnTo>
+                    <a:pt x="547783" y="734891"/>
+                  </a:lnTo>
+                  <a:lnTo>
+                    <a:pt x="476160" y="648445"/>
+                  </a:lnTo>
+                  <a:lnTo>
+                    <a:pt x="404537" y="559281"/>
+                  </a:lnTo>
+                  <a:lnTo>
+                    <a:pt x="332915" y="467313"/>
+                  </a:lnTo>
+                  <a:lnTo>
+                    <a:pt x="261292" y="372453"/>
+                  </a:lnTo>
+                  <a:lnTo>
+                    <a:pt x="189670" y="274609"/>
+                  </a:lnTo>
+                  <a:lnTo>
+                    <a:pt x="118047" y="173689"/>
+                  </a:lnTo>
+                  <a:lnTo>
+                    <a:pt x="46425" y="69595"/>
                   </a:lnTo>
                   <a:lnTo>
                     <a:pt x="0" y="0"/>
@@ -3964,216 +3964,216 @@
           </p:nvSpPr>
           <p:spPr>
             <a:xfrm>
-              <a:off x="3525138" y="2073503"/>
-              <a:ext cx="4737540" cy="3313926"/>
+              <a:off x="3527171" y="2073503"/>
+              <a:ext cx="4735507" cy="3314353"/>
             </a:xfrm>
             <a:custGeom>
               <a:avLst/>
               <a:pathLst>
-                <a:path w="4737540" h="3313926">
+                <a:path w="4735507" h="3314353">
                   <a:moveTo>
                     <a:pt x="0" y="0"/>
                   </a:moveTo>
                   <a:lnTo>
-                    <a:pt x="10454" y="50846"/>
-                  </a:lnTo>
-                  <a:lnTo>
-                    <a:pt x="82076" y="367111"/>
-                  </a:lnTo>
-                  <a:lnTo>
-                    <a:pt x="153699" y="654239"/>
-                  </a:lnTo>
-                  <a:lnTo>
-                    <a:pt x="225321" y="914915"/>
-                  </a:lnTo>
-                  <a:lnTo>
-                    <a:pt x="296944" y="1151575"/>
-                  </a:lnTo>
-                  <a:lnTo>
-                    <a:pt x="368566" y="1366432"/>
-                  </a:lnTo>
-                  <a:lnTo>
-                    <a:pt x="440189" y="1561495"/>
-                  </a:lnTo>
-                  <a:lnTo>
-                    <a:pt x="511811" y="1738588"/>
-                  </a:lnTo>
-                  <a:lnTo>
-                    <a:pt x="583434" y="1899365"/>
-                  </a:lnTo>
-                  <a:lnTo>
-                    <a:pt x="655056" y="2045330"/>
-                  </a:lnTo>
-                  <a:lnTo>
-                    <a:pt x="726679" y="2177848"/>
-                  </a:lnTo>
-                  <a:lnTo>
-                    <a:pt x="798301" y="2298157"/>
-                  </a:lnTo>
-                  <a:lnTo>
-                    <a:pt x="869924" y="2407383"/>
-                  </a:lnTo>
-                  <a:lnTo>
-                    <a:pt x="941546" y="2506546"/>
-                  </a:lnTo>
-                  <a:lnTo>
-                    <a:pt x="1013169" y="2596573"/>
-                  </a:lnTo>
-                  <a:lnTo>
-                    <a:pt x="1084791" y="2662044"/>
-                  </a:lnTo>
-                  <a:lnTo>
-                    <a:pt x="1156414" y="2687057"/>
-                  </a:lnTo>
-                  <a:lnTo>
-                    <a:pt x="1228037" y="2711310"/>
-                  </a:lnTo>
-                  <a:lnTo>
-                    <a:pt x="1299659" y="2734824"/>
-                  </a:lnTo>
-                  <a:lnTo>
-                    <a:pt x="1371282" y="2757622"/>
-                  </a:lnTo>
-                  <a:lnTo>
-                    <a:pt x="1442904" y="2779726"/>
-                  </a:lnTo>
-                  <a:lnTo>
-                    <a:pt x="1514527" y="2801158"/>
-                  </a:lnTo>
-                  <a:lnTo>
-                    <a:pt x="1586149" y="2821937"/>
-                  </a:lnTo>
-                  <a:lnTo>
-                    <a:pt x="1657772" y="2842083"/>
-                  </a:lnTo>
-                  <a:lnTo>
-                    <a:pt x="1729394" y="2861616"/>
-                  </a:lnTo>
-                  <a:lnTo>
-                    <a:pt x="1801017" y="2880555"/>
-                  </a:lnTo>
-                  <a:lnTo>
-                    <a:pt x="1872639" y="2898917"/>
-                  </a:lnTo>
-                  <a:lnTo>
-                    <a:pt x="1944262" y="2916720"/>
-                  </a:lnTo>
-                  <a:lnTo>
-                    <a:pt x="2015884" y="2933981"/>
-                  </a:lnTo>
-                  <a:lnTo>
-                    <a:pt x="2087507" y="2950717"/>
-                  </a:lnTo>
-                  <a:lnTo>
-                    <a:pt x="2159129" y="2966943"/>
-                  </a:lnTo>
-                  <a:lnTo>
-                    <a:pt x="2230752" y="2982675"/>
-                  </a:lnTo>
-                  <a:lnTo>
-                    <a:pt x="2302374" y="2997929"/>
-                  </a:lnTo>
-                  <a:lnTo>
-                    <a:pt x="2373997" y="3012718"/>
-                  </a:lnTo>
-                  <a:lnTo>
-                    <a:pt x="2445619" y="3027056"/>
-                  </a:lnTo>
-                  <a:lnTo>
-                    <a:pt x="2517242" y="3040959"/>
-                  </a:lnTo>
-                  <a:lnTo>
-                    <a:pt x="2588865" y="3054438"/>
-                  </a:lnTo>
-                  <a:lnTo>
-                    <a:pt x="2660487" y="3067507"/>
-                  </a:lnTo>
-                  <a:lnTo>
-                    <a:pt x="2732110" y="3080177"/>
-                  </a:lnTo>
-                  <a:lnTo>
-                    <a:pt x="2803732" y="3092463"/>
-                  </a:lnTo>
-                  <a:lnTo>
-                    <a:pt x="2875355" y="3104374"/>
-                  </a:lnTo>
-                  <a:lnTo>
-                    <a:pt x="2946977" y="3115923"/>
-                  </a:lnTo>
-                  <a:lnTo>
-                    <a:pt x="3018600" y="3127120"/>
-                  </a:lnTo>
-                  <a:lnTo>
-                    <a:pt x="3090222" y="3137976"/>
-                  </a:lnTo>
-                  <a:lnTo>
-                    <a:pt x="3161845" y="3148502"/>
-                  </a:lnTo>
-                  <a:lnTo>
-                    <a:pt x="3233467" y="3158707"/>
-                  </a:lnTo>
-                  <a:lnTo>
-                    <a:pt x="3305090" y="3168602"/>
-                  </a:lnTo>
-                  <a:lnTo>
-                    <a:pt x="3376712" y="3178195"/>
-                  </a:lnTo>
-                  <a:lnTo>
-                    <a:pt x="3448335" y="3187497"/>
-                  </a:lnTo>
-                  <a:lnTo>
-                    <a:pt x="3519957" y="3196515"/>
-                  </a:lnTo>
-                  <a:lnTo>
-                    <a:pt x="3591580" y="3205259"/>
-                  </a:lnTo>
-                  <a:lnTo>
-                    <a:pt x="3663202" y="3213736"/>
-                  </a:lnTo>
-                  <a:lnTo>
-                    <a:pt x="3734825" y="3221956"/>
-                  </a:lnTo>
-                  <a:lnTo>
-                    <a:pt x="3806447" y="3229925"/>
-                  </a:lnTo>
-                  <a:lnTo>
-                    <a:pt x="3878070" y="3237652"/>
-                  </a:lnTo>
-                  <a:lnTo>
-                    <a:pt x="3949693" y="3245143"/>
-                  </a:lnTo>
-                  <a:lnTo>
-                    <a:pt x="4021315" y="3252407"/>
-                  </a:lnTo>
-                  <a:lnTo>
-                    <a:pt x="4092938" y="3259449"/>
-                  </a:lnTo>
-                  <a:lnTo>
-                    <a:pt x="4164560" y="3266277"/>
-                  </a:lnTo>
-                  <a:lnTo>
-                    <a:pt x="4236183" y="3272897"/>
-                  </a:lnTo>
-                  <a:lnTo>
-                    <a:pt x="4307805" y="3279315"/>
-                  </a:lnTo>
-                  <a:lnTo>
-                    <a:pt x="4379428" y="3285539"/>
-                  </a:lnTo>
-                  <a:lnTo>
-                    <a:pt x="4451050" y="3291572"/>
-                  </a:lnTo>
-                  <a:lnTo>
-                    <a:pt x="4522673" y="3297422"/>
-                  </a:lnTo>
-                  <a:lnTo>
-                    <a:pt x="4594295" y="3303094"/>
-                  </a:lnTo>
-                  <a:lnTo>
-                    <a:pt x="4665918" y="3308594"/>
-                  </a:lnTo>
-                  <a:lnTo>
-                    <a:pt x="4737540" y="3313926"/>
+                    <a:pt x="8420" y="41159"/>
+                  </a:lnTo>
+                  <a:lnTo>
+                    <a:pt x="80043" y="358915"/>
+                  </a:lnTo>
+                  <a:lnTo>
+                    <a:pt x="151666" y="647342"/>
+                  </a:lnTo>
+                  <a:lnTo>
+                    <a:pt x="223288" y="909147"/>
+                  </a:lnTo>
+                  <a:lnTo>
+                    <a:pt x="294911" y="1146787"/>
+                  </a:lnTo>
+                  <a:lnTo>
+                    <a:pt x="366533" y="1362492"/>
+                  </a:lnTo>
+                  <a:lnTo>
+                    <a:pt x="438156" y="1558287"/>
+                  </a:lnTo>
+                  <a:lnTo>
+                    <a:pt x="509778" y="1736010"/>
+                  </a:lnTo>
+                  <a:lnTo>
+                    <a:pt x="581401" y="1897329"/>
+                  </a:lnTo>
+                  <a:lnTo>
+                    <a:pt x="653023" y="2043758"/>
+                  </a:lnTo>
+                  <a:lnTo>
+                    <a:pt x="724646" y="2176672"/>
+                  </a:lnTo>
+                  <a:lnTo>
+                    <a:pt x="796268" y="2297317"/>
+                  </a:lnTo>
+                  <a:lnTo>
+                    <a:pt x="867891" y="2406826"/>
+                  </a:lnTo>
+                  <a:lnTo>
+                    <a:pt x="939513" y="2506228"/>
+                  </a:lnTo>
+                  <a:lnTo>
+                    <a:pt x="1011136" y="2596454"/>
+                  </a:lnTo>
+                  <a:lnTo>
+                    <a:pt x="1082758" y="2662056"/>
+                  </a:lnTo>
+                  <a:lnTo>
+                    <a:pt x="1154381" y="2687108"/>
+                  </a:lnTo>
+                  <a:lnTo>
+                    <a:pt x="1226003" y="2711397"/>
+                  </a:lnTo>
+                  <a:lnTo>
+                    <a:pt x="1297626" y="2734945"/>
+                  </a:lnTo>
+                  <a:lnTo>
+                    <a:pt x="1369248" y="2757776"/>
+                  </a:lnTo>
+                  <a:lnTo>
+                    <a:pt x="1440871" y="2779910"/>
+                  </a:lnTo>
+                  <a:lnTo>
+                    <a:pt x="1512494" y="2801369"/>
+                  </a:lnTo>
+                  <a:lnTo>
+                    <a:pt x="1584116" y="2822174"/>
+                  </a:lnTo>
+                  <a:lnTo>
+                    <a:pt x="1655739" y="2842345"/>
+                  </a:lnTo>
+                  <a:lnTo>
+                    <a:pt x="1727361" y="2861900"/>
+                  </a:lnTo>
+                  <a:lnTo>
+                    <a:pt x="1798984" y="2880860"/>
+                  </a:lnTo>
+                  <a:lnTo>
+                    <a:pt x="1870606" y="2899241"/>
+                  </a:lnTo>
+                  <a:lnTo>
+                    <a:pt x="1942229" y="2917062"/>
+                  </a:lnTo>
+                  <a:lnTo>
+                    <a:pt x="2013851" y="2934340"/>
+                  </a:lnTo>
+                  <a:lnTo>
+                    <a:pt x="2085474" y="2951091"/>
+                  </a:lnTo>
+                  <a:lnTo>
+                    <a:pt x="2157096" y="2967331"/>
+                  </a:lnTo>
+                  <a:lnTo>
+                    <a:pt x="2228719" y="2983076"/>
+                  </a:lnTo>
+                  <a:lnTo>
+                    <a:pt x="2300341" y="2998341"/>
+                  </a:lnTo>
+                  <a:lnTo>
+                    <a:pt x="2371964" y="3013141"/>
+                  </a:lnTo>
+                  <a:lnTo>
+                    <a:pt x="2443586" y="3027489"/>
+                  </a:lnTo>
+                  <a:lnTo>
+                    <a:pt x="2515209" y="3041400"/>
+                  </a:lnTo>
+                  <a:lnTo>
+                    <a:pt x="2586831" y="3054886"/>
+                  </a:lnTo>
+                  <a:lnTo>
+                    <a:pt x="2658454" y="3067962"/>
+                  </a:lnTo>
+                  <a:lnTo>
+                    <a:pt x="2730076" y="3080639"/>
+                  </a:lnTo>
+                  <a:lnTo>
+                    <a:pt x="2801699" y="3092929"/>
+                  </a:lnTo>
+                  <a:lnTo>
+                    <a:pt x="2873322" y="3104845"/>
+                  </a:lnTo>
+                  <a:lnTo>
+                    <a:pt x="2944944" y="3116397"/>
+                  </a:lnTo>
+                  <a:lnTo>
+                    <a:pt x="3016567" y="3127597"/>
+                  </a:lnTo>
+                  <a:lnTo>
+                    <a:pt x="3088189" y="3138456"/>
+                  </a:lnTo>
+                  <a:lnTo>
+                    <a:pt x="3159812" y="3148983"/>
+                  </a:lnTo>
+                  <a:lnTo>
+                    <a:pt x="3231434" y="3159190"/>
+                  </a:lnTo>
+                  <a:lnTo>
+                    <a:pt x="3303057" y="3169085"/>
+                  </a:lnTo>
+                  <a:lnTo>
+                    <a:pt x="3374679" y="3178679"/>
+                  </a:lnTo>
+                  <a:lnTo>
+                    <a:pt x="3446302" y="3187980"/>
+                  </a:lnTo>
+                  <a:lnTo>
+                    <a:pt x="3517924" y="3196998"/>
+                  </a:lnTo>
+                  <a:lnTo>
+                    <a:pt x="3589547" y="3205741"/>
+                  </a:lnTo>
+                  <a:lnTo>
+                    <a:pt x="3661169" y="3214217"/>
+                  </a:lnTo>
+                  <a:lnTo>
+                    <a:pt x="3732792" y="3222435"/>
+                  </a:lnTo>
+                  <a:lnTo>
+                    <a:pt x="3804414" y="3230402"/>
+                  </a:lnTo>
+                  <a:lnTo>
+                    <a:pt x="3876037" y="3238126"/>
+                  </a:lnTo>
+                  <a:lnTo>
+                    <a:pt x="3947659" y="3245615"/>
+                  </a:lnTo>
+                  <a:lnTo>
+                    <a:pt x="4019282" y="3252875"/>
+                  </a:lnTo>
+                  <a:lnTo>
+                    <a:pt x="4090904" y="3259914"/>
+                  </a:lnTo>
+                  <a:lnTo>
+                    <a:pt x="4162527" y="3266739"/>
+                  </a:lnTo>
+                  <a:lnTo>
+                    <a:pt x="4234150" y="3273355"/>
+                  </a:lnTo>
+                  <a:lnTo>
+                    <a:pt x="4305772" y="3279770"/>
+                  </a:lnTo>
+                  <a:lnTo>
+                    <a:pt x="4377395" y="3285989"/>
+                  </a:lnTo>
+                  <a:lnTo>
+                    <a:pt x="4449017" y="3292018"/>
+                  </a:lnTo>
+                  <a:lnTo>
+                    <a:pt x="4520640" y="3297864"/>
+                  </a:lnTo>
+                  <a:lnTo>
+                    <a:pt x="4592262" y="3303531"/>
+                  </a:lnTo>
+                  <a:lnTo>
+                    <a:pt x="4663885" y="3309026"/>
+                  </a:lnTo>
+                  <a:lnTo>
+                    <a:pt x="4735507" y="3314353"/>
                   </a:lnTo>
                 </a:path>
               </a:pathLst>
@@ -4193,306 +4193,306 @@
           </p:nvSpPr>
           <p:spPr>
             <a:xfrm>
-              <a:off x="1263567" y="2073503"/>
-              <a:ext cx="6999111" cy="3477921"/>
+              <a:off x="1268869" y="2073503"/>
+              <a:ext cx="6993810" cy="3477978"/>
             </a:xfrm>
             <a:custGeom>
               <a:avLst/>
               <a:pathLst>
-                <a:path w="6999111" h="3477921">
+                <a:path w="6993810" h="3477978">
                   <a:moveTo>
-                    <a:pt x="6999111" y="3477921"/>
+                    <a:pt x="6993810" y="3477978"/>
                   </a:moveTo>
                   <a:lnTo>
-                    <a:pt x="6927489" y="3477330"/>
-                  </a:lnTo>
-                  <a:lnTo>
-                    <a:pt x="6855866" y="3476679"/>
-                  </a:lnTo>
-                  <a:lnTo>
-                    <a:pt x="6784244" y="3475962"/>
-                  </a:lnTo>
-                  <a:lnTo>
-                    <a:pt x="6712621" y="3475172"/>
-                  </a:lnTo>
-                  <a:lnTo>
-                    <a:pt x="6640999" y="3474302"/>
-                  </a:lnTo>
-                  <a:lnTo>
-                    <a:pt x="6569376" y="3473344"/>
-                  </a:lnTo>
-                  <a:lnTo>
-                    <a:pt x="6497754" y="3472288"/>
-                  </a:lnTo>
-                  <a:lnTo>
-                    <a:pt x="6426131" y="3471125"/>
-                  </a:lnTo>
-                  <a:lnTo>
-                    <a:pt x="6354509" y="3469844"/>
-                  </a:lnTo>
-                  <a:lnTo>
-                    <a:pt x="6282886" y="3468434"/>
-                  </a:lnTo>
-                  <a:lnTo>
-                    <a:pt x="6211264" y="3466880"/>
-                  </a:lnTo>
-                  <a:lnTo>
-                    <a:pt x="6139641" y="3465168"/>
-                  </a:lnTo>
-                  <a:lnTo>
-                    <a:pt x="6068018" y="3463283"/>
-                  </a:lnTo>
-                  <a:lnTo>
-                    <a:pt x="5996396" y="3461207"/>
-                  </a:lnTo>
-                  <a:lnTo>
-                    <a:pt x="5924773" y="3458919"/>
-                  </a:lnTo>
-                  <a:lnTo>
-                    <a:pt x="5853151" y="3456400"/>
-                  </a:lnTo>
-                  <a:lnTo>
-                    <a:pt x="5781528" y="3453625"/>
-                  </a:lnTo>
-                  <a:lnTo>
-                    <a:pt x="5709906" y="3450568"/>
-                  </a:lnTo>
-                  <a:lnTo>
-                    <a:pt x="5638283" y="3447201"/>
-                  </a:lnTo>
-                  <a:lnTo>
-                    <a:pt x="5566661" y="3443493"/>
-                  </a:lnTo>
-                  <a:lnTo>
-                    <a:pt x="5495038" y="3439408"/>
-                  </a:lnTo>
-                  <a:lnTo>
-                    <a:pt x="5423416" y="3434909"/>
-                  </a:lnTo>
-                  <a:lnTo>
-                    <a:pt x="5351793" y="3429953"/>
-                  </a:lnTo>
-                  <a:lnTo>
-                    <a:pt x="5280171" y="3424494"/>
-                  </a:lnTo>
-                  <a:lnTo>
-                    <a:pt x="5208548" y="3418482"/>
-                  </a:lnTo>
-                  <a:lnTo>
-                    <a:pt x="5136926" y="3411859"/>
-                  </a:lnTo>
-                  <a:lnTo>
-                    <a:pt x="5065303" y="3404564"/>
-                  </a:lnTo>
-                  <a:lnTo>
-                    <a:pt x="4993681" y="3396529"/>
-                  </a:lnTo>
-                  <a:lnTo>
-                    <a:pt x="4922058" y="3387678"/>
-                  </a:lnTo>
-                  <a:lnTo>
-                    <a:pt x="4850436" y="3377930"/>
-                  </a:lnTo>
-                  <a:lnTo>
-                    <a:pt x="4778813" y="3367192"/>
-                  </a:lnTo>
-                  <a:lnTo>
-                    <a:pt x="4707190" y="3355364"/>
-                  </a:lnTo>
-                  <a:lnTo>
-                    <a:pt x="4635568" y="3342336"/>
-                  </a:lnTo>
-                  <a:lnTo>
-                    <a:pt x="4563945" y="3327987"/>
-                  </a:lnTo>
-                  <a:lnTo>
-                    <a:pt x="4492323" y="3312181"/>
-                  </a:lnTo>
-                  <a:lnTo>
-                    <a:pt x="4420700" y="3294771"/>
-                  </a:lnTo>
-                  <a:lnTo>
-                    <a:pt x="4349078" y="3275594"/>
-                  </a:lnTo>
-                  <a:lnTo>
-                    <a:pt x="4277455" y="3254472"/>
-                  </a:lnTo>
-                  <a:lnTo>
-                    <a:pt x="4205833" y="3231206"/>
-                  </a:lnTo>
-                  <a:lnTo>
-                    <a:pt x="4134210" y="3205579"/>
-                  </a:lnTo>
-                  <a:lnTo>
-                    <a:pt x="4062588" y="3177351"/>
-                  </a:lnTo>
-                  <a:lnTo>
-                    <a:pt x="3990965" y="3146260"/>
-                  </a:lnTo>
-                  <a:lnTo>
-                    <a:pt x="3919343" y="3112013"/>
-                  </a:lnTo>
-                  <a:lnTo>
-                    <a:pt x="3847720" y="3074290"/>
-                  </a:lnTo>
-                  <a:lnTo>
-                    <a:pt x="3776098" y="3032740"/>
-                  </a:lnTo>
-                  <a:lnTo>
-                    <a:pt x="3704475" y="2986974"/>
-                  </a:lnTo>
-                  <a:lnTo>
-                    <a:pt x="3632853" y="2936563"/>
-                  </a:lnTo>
-                  <a:lnTo>
-                    <a:pt x="3561230" y="2881037"/>
-                  </a:lnTo>
-                  <a:lnTo>
-                    <a:pt x="3489608" y="2819876"/>
-                  </a:lnTo>
-                  <a:lnTo>
-                    <a:pt x="3417985" y="2752509"/>
-                  </a:lnTo>
-                  <a:lnTo>
-                    <a:pt x="3346362" y="2678306"/>
-                  </a:lnTo>
-                  <a:lnTo>
-                    <a:pt x="3274740" y="2636244"/>
-                  </a:lnTo>
-                  <a:lnTo>
-                    <a:pt x="3203117" y="2609635"/>
-                  </a:lnTo>
-                  <a:lnTo>
-                    <a:pt x="3131495" y="2582191"/>
-                  </a:lnTo>
-                  <a:lnTo>
-                    <a:pt x="3059872" y="2553884"/>
-                  </a:lnTo>
-                  <a:lnTo>
-                    <a:pt x="2988250" y="2524689"/>
-                  </a:lnTo>
-                  <a:lnTo>
-                    <a:pt x="2916627" y="2494577"/>
-                  </a:lnTo>
-                  <a:lnTo>
-                    <a:pt x="2845005" y="2463520"/>
-                  </a:lnTo>
-                  <a:lnTo>
-                    <a:pt x="2773382" y="2431488"/>
-                  </a:lnTo>
-                  <a:lnTo>
-                    <a:pt x="2701760" y="2398450"/>
-                  </a:lnTo>
-                  <a:lnTo>
-                    <a:pt x="2630137" y="2364375"/>
-                  </a:lnTo>
-                  <a:lnTo>
-                    <a:pt x="2558515" y="2329230"/>
-                  </a:lnTo>
-                  <a:lnTo>
-                    <a:pt x="2486892" y="2292981"/>
-                  </a:lnTo>
-                  <a:lnTo>
-                    <a:pt x="2415270" y="2255594"/>
-                  </a:lnTo>
-                  <a:lnTo>
-                    <a:pt x="2343647" y="2217034"/>
-                  </a:lnTo>
-                  <a:lnTo>
-                    <a:pt x="2272025" y="2177262"/>
-                  </a:lnTo>
-                  <a:lnTo>
-                    <a:pt x="2200402" y="2136242"/>
-                  </a:lnTo>
-                  <a:lnTo>
-                    <a:pt x="2128780" y="2093935"/>
-                  </a:lnTo>
-                  <a:lnTo>
-                    <a:pt x="2057157" y="2050298"/>
-                  </a:lnTo>
-                  <a:lnTo>
-                    <a:pt x="1985534" y="2005292"/>
-                  </a:lnTo>
-                  <a:lnTo>
-                    <a:pt x="1913912" y="1958873"/>
-                  </a:lnTo>
-                  <a:lnTo>
-                    <a:pt x="1842289" y="1910996"/>
-                  </a:lnTo>
-                  <a:lnTo>
-                    <a:pt x="1770667" y="1861616"/>
-                  </a:lnTo>
-                  <a:lnTo>
-                    <a:pt x="1699044" y="1810686"/>
-                  </a:lnTo>
-                  <a:lnTo>
-                    <a:pt x="1627422" y="1758156"/>
-                  </a:lnTo>
-                  <a:lnTo>
-                    <a:pt x="1555799" y="1703977"/>
-                  </a:lnTo>
-                  <a:lnTo>
-                    <a:pt x="1484177" y="1648098"/>
-                  </a:lnTo>
-                  <a:lnTo>
-                    <a:pt x="1412554" y="1590463"/>
-                  </a:lnTo>
-                  <a:lnTo>
-                    <a:pt x="1340932" y="1531019"/>
-                  </a:lnTo>
-                  <a:lnTo>
-                    <a:pt x="1269309" y="1469709"/>
-                  </a:lnTo>
-                  <a:lnTo>
-                    <a:pt x="1197687" y="1406474"/>
-                  </a:lnTo>
-                  <a:lnTo>
-                    <a:pt x="1126064" y="1341253"/>
-                  </a:lnTo>
-                  <a:lnTo>
-                    <a:pt x="1054442" y="1273985"/>
-                  </a:lnTo>
-                  <a:lnTo>
-                    <a:pt x="982819" y="1204605"/>
-                  </a:lnTo>
-                  <a:lnTo>
-                    <a:pt x="911197" y="1133046"/>
-                  </a:lnTo>
-                  <a:lnTo>
-                    <a:pt x="839574" y="1059241"/>
-                  </a:lnTo>
-                  <a:lnTo>
-                    <a:pt x="767952" y="983118"/>
-                  </a:lnTo>
-                  <a:lnTo>
-                    <a:pt x="696329" y="904605"/>
-                  </a:lnTo>
-                  <a:lnTo>
-                    <a:pt x="624706" y="823627"/>
-                  </a:lnTo>
-                  <a:lnTo>
-                    <a:pt x="553084" y="740107"/>
-                  </a:lnTo>
-                  <a:lnTo>
-                    <a:pt x="481461" y="653964"/>
-                  </a:lnTo>
-                  <a:lnTo>
-                    <a:pt x="409839" y="565117"/>
-                  </a:lnTo>
-                  <a:lnTo>
-                    <a:pt x="338216" y="473480"/>
-                  </a:lnTo>
-                  <a:lnTo>
-                    <a:pt x="266594" y="378966"/>
-                  </a:lnTo>
-                  <a:lnTo>
-                    <a:pt x="194971" y="281485"/>
-                  </a:lnTo>
-                  <a:lnTo>
-                    <a:pt x="123349" y="180943"/>
-                  </a:lnTo>
-                  <a:lnTo>
-                    <a:pt x="51726" y="77244"/>
+                    <a:pt x="6922187" y="3477392"/>
+                  </a:lnTo>
+                  <a:lnTo>
+                    <a:pt x="6850565" y="3476746"/>
+                  </a:lnTo>
+                  <a:lnTo>
+                    <a:pt x="6778942" y="3476034"/>
+                  </a:lnTo>
+                  <a:lnTo>
+                    <a:pt x="6707320" y="3475250"/>
+                  </a:lnTo>
+                  <a:lnTo>
+                    <a:pt x="6635697" y="3474385"/>
+                  </a:lnTo>
+                  <a:lnTo>
+                    <a:pt x="6564075" y="3473434"/>
+                  </a:lnTo>
+                  <a:lnTo>
+                    <a:pt x="6492452" y="3472385"/>
+                  </a:lnTo>
+                  <a:lnTo>
+                    <a:pt x="6420830" y="3471230"/>
+                  </a:lnTo>
+                  <a:lnTo>
+                    <a:pt x="6349207" y="3469957"/>
+                  </a:lnTo>
+                  <a:lnTo>
+                    <a:pt x="6277585" y="3468555"/>
+                  </a:lnTo>
+                  <a:lnTo>
+                    <a:pt x="6205962" y="3467010"/>
+                  </a:lnTo>
+                  <a:lnTo>
+                    <a:pt x="6134340" y="3465308"/>
+                  </a:lnTo>
+                  <a:lnTo>
+                    <a:pt x="6062717" y="3463433"/>
+                  </a:lnTo>
+                  <a:lnTo>
+                    <a:pt x="5991095" y="3461367"/>
+                  </a:lnTo>
+                  <a:lnTo>
+                    <a:pt x="5919472" y="3459091"/>
+                  </a:lnTo>
+                  <a:lnTo>
+                    <a:pt x="5847849" y="3456584"/>
+                  </a:lnTo>
+                  <a:lnTo>
+                    <a:pt x="5776227" y="3453822"/>
+                  </a:lnTo>
+                  <a:lnTo>
+                    <a:pt x="5704604" y="3450779"/>
+                  </a:lnTo>
+                  <a:lnTo>
+                    <a:pt x="5632982" y="3447427"/>
+                  </a:lnTo>
+                  <a:lnTo>
+                    <a:pt x="5561359" y="3443734"/>
+                  </a:lnTo>
+                  <a:lnTo>
+                    <a:pt x="5489737" y="3439665"/>
+                  </a:lnTo>
+                  <a:lnTo>
+                    <a:pt x="5418114" y="3435183"/>
+                  </a:lnTo>
+                  <a:lnTo>
+                    <a:pt x="5346492" y="3430244"/>
+                  </a:lnTo>
+                  <a:lnTo>
+                    <a:pt x="5274869" y="3424804"/>
+                  </a:lnTo>
+                  <a:lnTo>
+                    <a:pt x="5203247" y="3418810"/>
+                  </a:lnTo>
+                  <a:lnTo>
+                    <a:pt x="5131624" y="3412207"/>
+                  </a:lnTo>
+                  <a:lnTo>
+                    <a:pt x="5060002" y="3404932"/>
+                  </a:lnTo>
+                  <a:lnTo>
+                    <a:pt x="4988379" y="3396918"/>
+                  </a:lnTo>
+                  <a:lnTo>
+                    <a:pt x="4916757" y="3388088"/>
+                  </a:lnTo>
+                  <a:lnTo>
+                    <a:pt x="4845134" y="3378361"/>
+                  </a:lnTo>
+                  <a:lnTo>
+                    <a:pt x="4773512" y="3367645"/>
+                  </a:lnTo>
+                  <a:lnTo>
+                    <a:pt x="4701889" y="3355838"/>
+                  </a:lnTo>
+                  <a:lnTo>
+                    <a:pt x="4630267" y="3342832"/>
+                  </a:lnTo>
+                  <a:lnTo>
+                    <a:pt x="4558644" y="3328503"/>
+                  </a:lnTo>
+                  <a:lnTo>
+                    <a:pt x="4487021" y="3312716"/>
+                  </a:lnTo>
+                  <a:lnTo>
+                    <a:pt x="4415399" y="3295325"/>
+                  </a:lnTo>
+                  <a:lnTo>
+                    <a:pt x="4343776" y="3276164"/>
+                  </a:lnTo>
+                  <a:lnTo>
+                    <a:pt x="4272154" y="3255056"/>
+                  </a:lnTo>
+                  <a:lnTo>
+                    <a:pt x="4200531" y="3231801"/>
+                  </a:lnTo>
+                  <a:lnTo>
+                    <a:pt x="4128909" y="3206181"/>
+                  </a:lnTo>
+                  <a:lnTo>
+                    <a:pt x="4057286" y="3177956"/>
+                  </a:lnTo>
+                  <a:lnTo>
+                    <a:pt x="3985664" y="3146861"/>
+                  </a:lnTo>
+                  <a:lnTo>
+                    <a:pt x="3914041" y="3112604"/>
+                  </a:lnTo>
+                  <a:lnTo>
+                    <a:pt x="3842419" y="3074864"/>
+                  </a:lnTo>
+                  <a:lnTo>
+                    <a:pt x="3770796" y="3033285"/>
+                  </a:lnTo>
+                  <a:lnTo>
+                    <a:pt x="3699174" y="2987479"/>
+                  </a:lnTo>
+                  <a:lnTo>
+                    <a:pt x="3627551" y="2937015"/>
+                  </a:lnTo>
+                  <a:lnTo>
+                    <a:pt x="3555929" y="2881419"/>
+                  </a:lnTo>
+                  <a:lnTo>
+                    <a:pt x="3484306" y="2820170"/>
+                  </a:lnTo>
+                  <a:lnTo>
+                    <a:pt x="3412684" y="2752692"/>
+                  </a:lnTo>
+                  <a:lnTo>
+                    <a:pt x="3341061" y="2678353"/>
+                  </a:lnTo>
+                  <a:lnTo>
+                    <a:pt x="3269439" y="2636216"/>
+                  </a:lnTo>
+                  <a:lnTo>
+                    <a:pt x="3197816" y="2609563"/>
+                  </a:lnTo>
+                  <a:lnTo>
+                    <a:pt x="3126193" y="2582071"/>
+                  </a:lnTo>
+                  <a:lnTo>
+                    <a:pt x="3054571" y="2553716"/>
+                  </a:lnTo>
+                  <a:lnTo>
+                    <a:pt x="2982948" y="2524468"/>
+                  </a:lnTo>
+                  <a:lnTo>
+                    <a:pt x="2911326" y="2494301"/>
+                  </a:lnTo>
+                  <a:lnTo>
+                    <a:pt x="2839703" y="2463185"/>
+                  </a:lnTo>
+                  <a:lnTo>
+                    <a:pt x="2768081" y="2431090"/>
+                  </a:lnTo>
+                  <a:lnTo>
+                    <a:pt x="2696458" y="2397987"/>
+                  </a:lnTo>
+                  <a:lnTo>
+                    <a:pt x="2624836" y="2363842"/>
+                  </a:lnTo>
+                  <a:lnTo>
+                    <a:pt x="2553213" y="2328623"/>
+                  </a:lnTo>
+                  <a:lnTo>
+                    <a:pt x="2481591" y="2292297"/>
+                  </a:lnTo>
+                  <a:lnTo>
+                    <a:pt x="2409968" y="2254829"/>
+                  </a:lnTo>
+                  <a:lnTo>
+                    <a:pt x="2338346" y="2216182"/>
+                  </a:lnTo>
+                  <a:lnTo>
+                    <a:pt x="2266723" y="2176320"/>
+                  </a:lnTo>
+                  <a:lnTo>
+                    <a:pt x="2195101" y="2135204"/>
+                  </a:lnTo>
+                  <a:lnTo>
+                    <a:pt x="2123478" y="2092795"/>
+                  </a:lnTo>
+                  <a:lnTo>
+                    <a:pt x="2051856" y="2049053"/>
+                  </a:lnTo>
+                  <a:lnTo>
+                    <a:pt x="1980233" y="2003935"/>
+                  </a:lnTo>
+                  <a:lnTo>
+                    <a:pt x="1908611" y="1957398"/>
+                  </a:lnTo>
+                  <a:lnTo>
+                    <a:pt x="1836988" y="1909397"/>
+                  </a:lnTo>
+                  <a:lnTo>
+                    <a:pt x="1765365" y="1859888"/>
+                  </a:lnTo>
+                  <a:lnTo>
+                    <a:pt x="1693743" y="1808821"/>
+                  </a:lnTo>
+                  <a:lnTo>
+                    <a:pt x="1622120" y="1756148"/>
+                  </a:lnTo>
+                  <a:lnTo>
+                    <a:pt x="1550498" y="1701819"/>
+                  </a:lnTo>
+                  <a:lnTo>
+                    <a:pt x="1478875" y="1645781"/>
+                  </a:lnTo>
+                  <a:lnTo>
+                    <a:pt x="1407253" y="1587981"/>
+                  </a:lnTo>
+                  <a:lnTo>
+                    <a:pt x="1335630" y="1528363"/>
+                  </a:lnTo>
+                  <a:lnTo>
+                    <a:pt x="1264008" y="1466871"/>
+                  </a:lnTo>
+                  <a:lnTo>
+                    <a:pt x="1192385" y="1403444"/>
+                  </a:lnTo>
+                  <a:lnTo>
+                    <a:pt x="1120763" y="1338023"/>
+                  </a:lnTo>
+                  <a:lnTo>
+                    <a:pt x="1049140" y="1270545"/>
+                  </a:lnTo>
+                  <a:lnTo>
+                    <a:pt x="977518" y="1200944"/>
+                  </a:lnTo>
+                  <a:lnTo>
+                    <a:pt x="905895" y="1129155"/>
+                  </a:lnTo>
+                  <a:lnTo>
+                    <a:pt x="834273" y="1055108"/>
+                  </a:lnTo>
+                  <a:lnTo>
+                    <a:pt x="762650" y="978733"/>
+                  </a:lnTo>
+                  <a:lnTo>
+                    <a:pt x="691028" y="899956"/>
+                  </a:lnTo>
+                  <a:lnTo>
+                    <a:pt x="619405" y="818701"/>
+                  </a:lnTo>
+                  <a:lnTo>
+                    <a:pt x="547783" y="734891"/>
+                  </a:lnTo>
+                  <a:lnTo>
+                    <a:pt x="476160" y="648445"/>
+                  </a:lnTo>
+                  <a:lnTo>
+                    <a:pt x="404537" y="559281"/>
+                  </a:lnTo>
+                  <a:lnTo>
+                    <a:pt x="332915" y="467313"/>
+                  </a:lnTo>
+                  <a:lnTo>
+                    <a:pt x="261292" y="372453"/>
+                  </a:lnTo>
+                  <a:lnTo>
+                    <a:pt x="189670" y="274609"/>
+                  </a:lnTo>
+                  <a:lnTo>
+                    <a:pt x="118047" y="173689"/>
+                  </a:lnTo>
+                  <a:lnTo>
+                    <a:pt x="46425" y="69595"/>
                   </a:lnTo>
                   <a:lnTo>
                     <a:pt x="0" y="0"/>
@@ -4515,237 +4515,237 @@
           </p:nvSpPr>
           <p:spPr>
             <a:xfrm>
-              <a:off x="2977042" y="2073503"/>
-              <a:ext cx="5285636" cy="3452295"/>
+              <a:off x="2980134" y="2073503"/>
+              <a:ext cx="5282544" cy="3452488"/>
             </a:xfrm>
             <a:custGeom>
               <a:avLst/>
               <a:pathLst>
-                <a:path w="5285636" h="3452295">
+                <a:path w="5282544" h="3452488">
                   <a:moveTo>
                     <a:pt x="0" y="0"/>
                   </a:moveTo>
                   <a:lnTo>
-                    <a:pt x="57192" y="174062"/>
-                  </a:lnTo>
-                  <a:lnTo>
-                    <a:pt x="128815" y="378572"/>
-                  </a:lnTo>
-                  <a:lnTo>
-                    <a:pt x="200437" y="570445"/>
-                  </a:lnTo>
-                  <a:lnTo>
-                    <a:pt x="272060" y="750461"/>
-                  </a:lnTo>
-                  <a:lnTo>
-                    <a:pt x="343682" y="919355"/>
-                  </a:lnTo>
-                  <a:lnTo>
-                    <a:pt x="415305" y="1077812"/>
-                  </a:lnTo>
-                  <a:lnTo>
-                    <a:pt x="486927" y="1226478"/>
-                  </a:lnTo>
-                  <a:lnTo>
-                    <a:pt x="558550" y="1365958"/>
-                  </a:lnTo>
-                  <a:lnTo>
-                    <a:pt x="630172" y="1496819"/>
-                  </a:lnTo>
-                  <a:lnTo>
-                    <a:pt x="701795" y="1619594"/>
-                  </a:lnTo>
-                  <a:lnTo>
-                    <a:pt x="773417" y="1734782"/>
-                  </a:lnTo>
-                  <a:lnTo>
-                    <a:pt x="845040" y="1842853"/>
-                  </a:lnTo>
-                  <a:lnTo>
-                    <a:pt x="916662" y="1944246"/>
-                  </a:lnTo>
-                  <a:lnTo>
-                    <a:pt x="988285" y="2039374"/>
-                  </a:lnTo>
-                  <a:lnTo>
-                    <a:pt x="1059907" y="2128624"/>
-                  </a:lnTo>
-                  <a:lnTo>
-                    <a:pt x="1131530" y="2212358"/>
-                  </a:lnTo>
-                  <a:lnTo>
-                    <a:pt x="1203152" y="2290919"/>
-                  </a:lnTo>
-                  <a:lnTo>
-                    <a:pt x="1274775" y="2364626"/>
-                  </a:lnTo>
-                  <a:lnTo>
-                    <a:pt x="1346398" y="2433778"/>
-                  </a:lnTo>
-                  <a:lnTo>
-                    <a:pt x="1418020" y="2498657"/>
-                  </a:lnTo>
-                  <a:lnTo>
-                    <a:pt x="1489643" y="2559527"/>
-                  </a:lnTo>
-                  <a:lnTo>
-                    <a:pt x="1561265" y="2616635"/>
-                  </a:lnTo>
-                  <a:lnTo>
-                    <a:pt x="1632888" y="2670215"/>
-                  </a:lnTo>
-                  <a:lnTo>
-                    <a:pt x="1704510" y="2720485"/>
-                  </a:lnTo>
-                  <a:lnTo>
-                    <a:pt x="1776133" y="2767648"/>
-                  </a:lnTo>
-                  <a:lnTo>
-                    <a:pt x="1847755" y="2811896"/>
-                  </a:lnTo>
-                  <a:lnTo>
-                    <a:pt x="1919378" y="2853411"/>
-                  </a:lnTo>
-                  <a:lnTo>
-                    <a:pt x="1991000" y="2892360"/>
-                  </a:lnTo>
-                  <a:lnTo>
-                    <a:pt x="2062623" y="2928903"/>
-                  </a:lnTo>
-                  <a:lnTo>
-                    <a:pt x="2134245" y="2963187"/>
-                  </a:lnTo>
-                  <a:lnTo>
-                    <a:pt x="2205868" y="2995353"/>
-                  </a:lnTo>
-                  <a:lnTo>
-                    <a:pt x="2277490" y="3025532"/>
-                  </a:lnTo>
-                  <a:lnTo>
-                    <a:pt x="2349113" y="3053845"/>
-                  </a:lnTo>
-                  <a:lnTo>
-                    <a:pt x="2420735" y="3080410"/>
-                  </a:lnTo>
-                  <a:lnTo>
-                    <a:pt x="2492358" y="3105332"/>
-                  </a:lnTo>
-                  <a:lnTo>
-                    <a:pt x="2563980" y="3128715"/>
-                  </a:lnTo>
-                  <a:lnTo>
-                    <a:pt x="2635603" y="3150653"/>
-                  </a:lnTo>
-                  <a:lnTo>
-                    <a:pt x="2707226" y="3171235"/>
-                  </a:lnTo>
-                  <a:lnTo>
-                    <a:pt x="2778848" y="3190546"/>
-                  </a:lnTo>
-                  <a:lnTo>
-                    <a:pt x="2850471" y="3208663"/>
-                  </a:lnTo>
-                  <a:lnTo>
-                    <a:pt x="2922093" y="3225661"/>
-                  </a:lnTo>
-                  <a:lnTo>
-                    <a:pt x="2993716" y="3241608"/>
-                  </a:lnTo>
-                  <a:lnTo>
-                    <a:pt x="3065338" y="3256570"/>
-                  </a:lnTo>
-                  <a:lnTo>
-                    <a:pt x="3136961" y="3270608"/>
-                  </a:lnTo>
-                  <a:lnTo>
-                    <a:pt x="3208583" y="3283778"/>
-                  </a:lnTo>
-                  <a:lnTo>
-                    <a:pt x="3280206" y="3296134"/>
-                  </a:lnTo>
-                  <a:lnTo>
-                    <a:pt x="3351828" y="3307727"/>
-                  </a:lnTo>
-                  <a:lnTo>
-                    <a:pt x="3423451" y="3318604"/>
-                  </a:lnTo>
-                  <a:lnTo>
-                    <a:pt x="3495073" y="3328808"/>
-                  </a:lnTo>
-                  <a:lnTo>
-                    <a:pt x="3566696" y="3338382"/>
-                  </a:lnTo>
-                  <a:lnTo>
-                    <a:pt x="3638318" y="3347364"/>
-                  </a:lnTo>
-                  <a:lnTo>
-                    <a:pt x="3709941" y="3355791"/>
-                  </a:lnTo>
-                  <a:lnTo>
-                    <a:pt x="3781563" y="3363698"/>
-                  </a:lnTo>
-                  <a:lnTo>
-                    <a:pt x="3853186" y="3371116"/>
-                  </a:lnTo>
-                  <a:lnTo>
-                    <a:pt x="3924808" y="3378075"/>
-                  </a:lnTo>
-                  <a:lnTo>
-                    <a:pt x="3996431" y="3384605"/>
-                  </a:lnTo>
-                  <a:lnTo>
-                    <a:pt x="4068053" y="3390731"/>
-                  </a:lnTo>
-                  <a:lnTo>
-                    <a:pt x="4139676" y="3396479"/>
-                  </a:lnTo>
-                  <a:lnTo>
-                    <a:pt x="4211299" y="3401871"/>
-                  </a:lnTo>
-                  <a:lnTo>
-                    <a:pt x="4282921" y="3406930"/>
-                  </a:lnTo>
-                  <a:lnTo>
-                    <a:pt x="4354544" y="3411677"/>
-                  </a:lnTo>
-                  <a:lnTo>
-                    <a:pt x="4426166" y="3416130"/>
-                  </a:lnTo>
-                  <a:lnTo>
-                    <a:pt x="4497789" y="3420308"/>
-                  </a:lnTo>
-                  <a:lnTo>
-                    <a:pt x="4569411" y="3424228"/>
-                  </a:lnTo>
-                  <a:lnTo>
-                    <a:pt x="4641034" y="3427906"/>
-                  </a:lnTo>
-                  <a:lnTo>
-                    <a:pt x="4712656" y="3431356"/>
-                  </a:lnTo>
-                  <a:lnTo>
-                    <a:pt x="4784279" y="3434594"/>
-                  </a:lnTo>
-                  <a:lnTo>
-                    <a:pt x="4855901" y="3437631"/>
-                  </a:lnTo>
-                  <a:lnTo>
-                    <a:pt x="4927524" y="3440480"/>
-                  </a:lnTo>
-                  <a:lnTo>
-                    <a:pt x="4999146" y="3443154"/>
-                  </a:lnTo>
-                  <a:lnTo>
-                    <a:pt x="5070769" y="3445662"/>
-                  </a:lnTo>
-                  <a:lnTo>
-                    <a:pt x="5142391" y="3448015"/>
-                  </a:lnTo>
-                  <a:lnTo>
-                    <a:pt x="5214014" y="3450223"/>
-                  </a:lnTo>
-                  <a:lnTo>
-                    <a:pt x="5285636" y="3452295"/>
+                    <a:pt x="54100" y="165404"/>
+                  </a:lnTo>
+                  <a:lnTo>
+                    <a:pt x="125722" y="370823"/>
+                  </a:lnTo>
+                  <a:lnTo>
+                    <a:pt x="197345" y="563527"/>
+                  </a:lnTo>
+                  <a:lnTo>
+                    <a:pt x="268968" y="744301"/>
+                  </a:lnTo>
+                  <a:lnTo>
+                    <a:pt x="340590" y="913884"/>
+                  </a:lnTo>
+                  <a:lnTo>
+                    <a:pt x="412213" y="1072970"/>
+                  </a:lnTo>
+                  <a:lnTo>
+                    <a:pt x="483835" y="1222208"/>
+                  </a:lnTo>
+                  <a:lnTo>
+                    <a:pt x="555458" y="1362207"/>
+                  </a:lnTo>
+                  <a:lnTo>
+                    <a:pt x="627080" y="1493539"/>
+                  </a:lnTo>
+                  <a:lnTo>
+                    <a:pt x="698703" y="1616741"/>
+                  </a:lnTo>
+                  <a:lnTo>
+                    <a:pt x="770325" y="1732317"/>
+                  </a:lnTo>
+                  <a:lnTo>
+                    <a:pt x="841948" y="1840738"/>
+                  </a:lnTo>
+                  <a:lnTo>
+                    <a:pt x="913570" y="1942448"/>
+                  </a:lnTo>
+                  <a:lnTo>
+                    <a:pt x="985193" y="2037861"/>
+                  </a:lnTo>
+                  <a:lnTo>
+                    <a:pt x="1056815" y="2127367"/>
+                  </a:lnTo>
+                  <a:lnTo>
+                    <a:pt x="1128438" y="2211333"/>
+                  </a:lnTo>
+                  <a:lnTo>
+                    <a:pt x="1200060" y="2290101"/>
+                  </a:lnTo>
+                  <a:lnTo>
+                    <a:pt x="1271683" y="2363993"/>
+                  </a:lnTo>
+                  <a:lnTo>
+                    <a:pt x="1343305" y="2433310"/>
+                  </a:lnTo>
+                  <a:lnTo>
+                    <a:pt x="1414928" y="2498337"/>
+                  </a:lnTo>
+                  <a:lnTo>
+                    <a:pt x="1486550" y="2559338"/>
+                  </a:lnTo>
+                  <a:lnTo>
+                    <a:pt x="1558173" y="2616563"/>
+                  </a:lnTo>
+                  <a:lnTo>
+                    <a:pt x="1629796" y="2670245"/>
+                  </a:lnTo>
+                  <a:lnTo>
+                    <a:pt x="1701418" y="2720604"/>
+                  </a:lnTo>
+                  <a:lnTo>
+                    <a:pt x="1773041" y="2767846"/>
+                  </a:lnTo>
+                  <a:lnTo>
+                    <a:pt x="1844663" y="2812164"/>
+                  </a:lnTo>
+                  <a:lnTo>
+                    <a:pt x="1916286" y="2853737"/>
+                  </a:lnTo>
+                  <a:lnTo>
+                    <a:pt x="1987908" y="2892738"/>
+                  </a:lnTo>
+                  <a:lnTo>
+                    <a:pt x="2059531" y="2929324"/>
+                  </a:lnTo>
+                  <a:lnTo>
+                    <a:pt x="2131153" y="2963645"/>
+                  </a:lnTo>
+                  <a:lnTo>
+                    <a:pt x="2202776" y="2995841"/>
+                  </a:lnTo>
+                  <a:lnTo>
+                    <a:pt x="2274398" y="3026045"/>
+                  </a:lnTo>
+                  <a:lnTo>
+                    <a:pt x="2346021" y="3054379"/>
+                  </a:lnTo>
+                  <a:lnTo>
+                    <a:pt x="2417643" y="3080958"/>
+                  </a:lnTo>
+                  <a:lnTo>
+                    <a:pt x="2489266" y="3105893"/>
+                  </a:lnTo>
+                  <a:lnTo>
+                    <a:pt x="2560888" y="3129283"/>
+                  </a:lnTo>
+                  <a:lnTo>
+                    <a:pt x="2632511" y="3151226"/>
+                  </a:lnTo>
+                  <a:lnTo>
+                    <a:pt x="2704133" y="3171811"/>
+                  </a:lnTo>
+                  <a:lnTo>
+                    <a:pt x="2775756" y="3191121"/>
+                  </a:lnTo>
+                  <a:lnTo>
+                    <a:pt x="2847378" y="3209236"/>
+                  </a:lnTo>
+                  <a:lnTo>
+                    <a:pt x="2919001" y="3226229"/>
+                  </a:lnTo>
+                  <a:lnTo>
+                    <a:pt x="2990624" y="3242170"/>
+                  </a:lnTo>
+                  <a:lnTo>
+                    <a:pt x="3062246" y="3257125"/>
+                  </a:lnTo>
+                  <a:lnTo>
+                    <a:pt x="3133869" y="3271154"/>
+                  </a:lnTo>
+                  <a:lnTo>
+                    <a:pt x="3205491" y="3284314"/>
+                  </a:lnTo>
+                  <a:lnTo>
+                    <a:pt x="3277114" y="3296660"/>
+                  </a:lnTo>
+                  <a:lnTo>
+                    <a:pt x="3348736" y="3308241"/>
+                  </a:lnTo>
+                  <a:lnTo>
+                    <a:pt x="3420359" y="3319106"/>
+                  </a:lnTo>
+                  <a:lnTo>
+                    <a:pt x="3491981" y="3329298"/>
+                  </a:lnTo>
+                  <a:lnTo>
+                    <a:pt x="3563604" y="3338859"/>
+                  </a:lnTo>
+                  <a:lnTo>
+                    <a:pt x="3635226" y="3347828"/>
+                  </a:lnTo>
+                  <a:lnTo>
+                    <a:pt x="3706849" y="3356242"/>
+                  </a:lnTo>
+                  <a:lnTo>
+                    <a:pt x="3778471" y="3364135"/>
+                  </a:lnTo>
+                  <a:lnTo>
+                    <a:pt x="3850094" y="3371540"/>
+                  </a:lnTo>
+                  <a:lnTo>
+                    <a:pt x="3921716" y="3378486"/>
+                  </a:lnTo>
+                  <a:lnTo>
+                    <a:pt x="3993339" y="3385002"/>
+                  </a:lnTo>
+                  <a:lnTo>
+                    <a:pt x="4064961" y="3391114"/>
+                  </a:lnTo>
+                  <a:lnTo>
+                    <a:pt x="4136584" y="3396849"/>
+                  </a:lnTo>
+                  <a:lnTo>
+                    <a:pt x="4208206" y="3402228"/>
+                  </a:lnTo>
+                  <a:lnTo>
+                    <a:pt x="4279829" y="3407274"/>
+                  </a:lnTo>
+                  <a:lnTo>
+                    <a:pt x="4351452" y="3412008"/>
+                  </a:lnTo>
+                  <a:lnTo>
+                    <a:pt x="4423074" y="3416449"/>
+                  </a:lnTo>
+                  <a:lnTo>
+                    <a:pt x="4494697" y="3420615"/>
+                  </a:lnTo>
+                  <a:lnTo>
+                    <a:pt x="4566319" y="3424523"/>
+                  </a:lnTo>
+                  <a:lnTo>
+                    <a:pt x="4637942" y="3428190"/>
+                  </a:lnTo>
+                  <a:lnTo>
+                    <a:pt x="4709564" y="3431629"/>
+                  </a:lnTo>
+                  <a:lnTo>
+                    <a:pt x="4781187" y="3434855"/>
+                  </a:lnTo>
+                  <a:lnTo>
+                    <a:pt x="4852809" y="3437882"/>
+                  </a:lnTo>
+                  <a:lnTo>
+                    <a:pt x="4924432" y="3440721"/>
+                  </a:lnTo>
+                  <a:lnTo>
+                    <a:pt x="4996054" y="3443384"/>
+                  </a:lnTo>
+                  <a:lnTo>
+                    <a:pt x="5067677" y="3445883"/>
+                  </a:lnTo>
+                  <a:lnTo>
+                    <a:pt x="5139299" y="3448227"/>
+                  </a:lnTo>
+                  <a:lnTo>
+                    <a:pt x="5210922" y="3450426"/>
+                  </a:lnTo>
+                  <a:lnTo>
+                    <a:pt x="5282544" y="3452488"/>
                   </a:lnTo>
                 </a:path>
               </a:pathLst>
@@ -5629,7 +5629,7 @@
                   <a:latin typeface="Helvetica"/>
                   <a:cs typeface="Helvetica"/>
                 </a:rPr>
-                <a:t>subHR per 10 % decline: 2.15 (1.45-3.19), p = &lt;0.001  |  per IQR decline (Δ = 29.3 %): 9.43 (2.97-29.95)  |  IQR: [-14.6, 14.7] %</a:t>
+                <a:t>subHR per 10 % decline: 2.16 (1.45-3.20), p = &lt;0.001  |  per IQR decline (Δ = 29.3 %): 9.47 (2.97-30.15)  |  IQR: [-14.6, 14.7] %</a:t>
               </a:r>
             </a:p>
           </p:txBody>
